--- a/documents/HyunahKwon/design/studysubject/연구분야기획서.pptx
+++ b/documents/HyunahKwon/design/studysubject/연구분야기획서.pptx
@@ -5339,6 +5339,14 @@
             </a:r>
             <a:r>
               <a:rPr lang="ko-KR" altLang="en-US" dirty="0"/>
+              <a:t>거리</a:t>
+            </a:r>
+            <a:r>
+              <a:rPr lang="en-US" altLang="ko-KR" dirty="0"/>
+              <a:t>, </a:t>
+            </a:r>
+            <a:r>
+              <a:rPr lang="ko-KR" altLang="en-US" dirty="0"/>
               <a:t>생태계 생물 종간 관계를 이용해 계획 경로로의 위험도를 예측</a:t>
             </a:r>
             <a:r>
@@ -5462,7 +5470,7 @@
         <p:spPr/>
         <p:txBody>
           <a:bodyPr>
-            <a:normAutofit fontScale="92500"/>
+            <a:normAutofit fontScale="92500" lnSpcReduction="10000"/>
           </a:bodyPr>
           <a:lstStyle/>
           <a:p>
@@ -5566,7 +5574,7 @@
               <a:rPr lang="ko-KR" altLang="en-US" sz="2400" dirty="0">
                 <a:sym typeface="Wingdings" panose="05000000000000000000" pitchFamily="2" charset="2"/>
               </a:rPr>
-              <a:t>개체 반응 </a:t>
+              <a:t>개체 기반 시뮬레이션 </a:t>
             </a:r>
             <a:r>
               <a:rPr lang="en-US" altLang="ko-KR" sz="2400" dirty="0">
@@ -5737,216 +5745,298 @@
         </p:nvSpPr>
         <p:spPr/>
         <p:txBody>
-          <a:bodyPr>
-            <a:normAutofit/>
+          <a:bodyPr anchor="ctr">
+            <a:noAutofit/>
           </a:bodyPr>
           <a:lstStyle/>
           <a:p>
             <a:pPr>
               <a:lnSpc>
-                <a:spcPct val="110000"/>
+                <a:spcPct val="100000"/>
               </a:lnSpc>
             </a:pPr>
             <a:r>
-              <a:rPr lang="ko-KR" altLang="en-US" sz="2400" dirty="0"/>
+              <a:rPr lang="ko-KR" altLang="en-US" sz="2000" dirty="0"/>
               <a:t>비교대상</a:t>
             </a:r>
             <a:br>
-              <a:rPr lang="en-US" altLang="ko-KR" sz="2400" dirty="0"/>
+              <a:rPr lang="en-US" altLang="ko-KR" sz="2000" dirty="0"/>
             </a:br>
             <a:r>
-              <a:rPr lang="en-US" altLang="ko-KR" sz="2400" dirty="0">
+              <a:rPr lang="en-US" altLang="ko-KR" sz="2000" dirty="0">
                 <a:sym typeface="Wingdings" panose="05000000000000000000" pitchFamily="2" charset="2"/>
               </a:rPr>
               <a:t> </a:t>
             </a:r>
             <a:r>
-              <a:rPr lang="ko-KR" altLang="en-US" sz="2400" dirty="0">
+              <a:rPr lang="ko-KR" altLang="en-US" sz="2000" dirty="0">
                 <a:sym typeface="Wingdings" panose="05000000000000000000" pitchFamily="2" charset="2"/>
               </a:rPr>
               <a:t>고정 </a:t>
             </a:r>
             <a:r>
-              <a:rPr lang="en-US" altLang="ko-KR" sz="2400" dirty="0">
+              <a:rPr lang="en-US" altLang="ko-KR" sz="2000" dirty="0">
                 <a:sym typeface="Wingdings" panose="05000000000000000000" pitchFamily="2" charset="2"/>
               </a:rPr>
               <a:t>spawn AI</a:t>
             </a:r>
             <a:r>
-              <a:rPr lang="ko-KR" altLang="en-US" sz="2400" dirty="0">
+              <a:rPr lang="ko-KR" altLang="en-US" sz="2000" dirty="0">
                 <a:sym typeface="Wingdings" panose="05000000000000000000" pitchFamily="2" charset="2"/>
               </a:rPr>
               <a:t>와 </a:t>
             </a:r>
             <a:r>
-              <a:rPr lang="en-US" altLang="ko-KR" sz="2400" dirty="0">
+              <a:rPr lang="en-US" altLang="ko-KR" sz="2000" dirty="0">
                 <a:sym typeface="Wingdings" panose="05000000000000000000" pitchFamily="2" charset="2"/>
               </a:rPr>
               <a:t>A*</a:t>
             </a:r>
             <a:br>
-              <a:rPr lang="en-US" altLang="ko-KR" sz="2400" dirty="0">
+              <a:rPr lang="en-US" altLang="ko-KR" sz="2000" dirty="0">
                 <a:sym typeface="Wingdings" panose="05000000000000000000" pitchFamily="2" charset="2"/>
               </a:rPr>
             </a:br>
             <a:r>
-              <a:rPr lang="en-US" altLang="ko-KR" sz="2400" dirty="0">
+              <a:rPr lang="en-US" altLang="ko-KR" sz="2000" dirty="0">
+                <a:sym typeface="Wingdings" panose="05000000000000000000" pitchFamily="2" charset="2"/>
+              </a:rPr>
+              <a:t>(</a:t>
+            </a:r>
+            <a:r>
+              <a:rPr lang="ko-KR" altLang="en-US" sz="2000" dirty="0">
+                <a:sym typeface="Wingdings" panose="05000000000000000000" pitchFamily="2" charset="2"/>
+              </a:rPr>
+              <a:t>몬스터 무시 정적 경로와 </a:t>
+            </a:r>
+            <a:r>
+              <a:rPr lang="en-US" altLang="ko-KR" sz="2000" dirty="0" err="1">
+                <a:sym typeface="Wingdings" panose="05000000000000000000" pitchFamily="2" charset="2"/>
+              </a:rPr>
+              <a:t>npc</a:t>
+            </a:r>
+            <a:r>
+              <a:rPr lang="ko-KR" altLang="en-US" sz="2000" dirty="0">
+                <a:sym typeface="Wingdings" panose="05000000000000000000" pitchFamily="2" charset="2"/>
+              </a:rPr>
+              <a:t>의 고정된 위치</a:t>
+            </a:r>
+            <a:r>
+              <a:rPr lang="en-US" altLang="ko-KR" sz="2000" dirty="0">
+                <a:sym typeface="Wingdings" panose="05000000000000000000" pitchFamily="2" charset="2"/>
+              </a:rPr>
+              <a:t>)</a:t>
+            </a:r>
+            <a:br>
+              <a:rPr lang="en-US" altLang="ko-KR" sz="2000" dirty="0">
+                <a:sym typeface="Wingdings" panose="05000000000000000000" pitchFamily="2" charset="2"/>
+              </a:rPr>
+            </a:br>
+            <a:r>
+              <a:rPr lang="en-US" altLang="ko-KR" sz="2000" dirty="0">
                 <a:sym typeface="Wingdings" panose="05000000000000000000" pitchFamily="2" charset="2"/>
               </a:rPr>
               <a:t> </a:t>
             </a:r>
             <a:r>
-              <a:rPr lang="ko-KR" altLang="en-US" sz="2400" dirty="0">
+              <a:rPr lang="ko-KR" altLang="en-US" sz="2000" dirty="0">
                 <a:sym typeface="Wingdings" panose="05000000000000000000" pitchFamily="2" charset="2"/>
               </a:rPr>
               <a:t>환경 질의 시스템</a:t>
             </a:r>
-            <a:endParaRPr lang="en-US" altLang="ko-KR" sz="2400" dirty="0"/>
+            <a:br>
+              <a:rPr lang="en-US" altLang="ko-KR" sz="2000" dirty="0">
+                <a:sym typeface="Wingdings" panose="05000000000000000000" pitchFamily="2" charset="2"/>
+              </a:rPr>
+            </a:br>
+            <a:r>
+              <a:rPr lang="en-US" altLang="ko-KR" sz="2000" dirty="0">
+                <a:sym typeface="Wingdings" panose="05000000000000000000" pitchFamily="2" charset="2"/>
+              </a:rPr>
+              <a:t>(</a:t>
+            </a:r>
+            <a:r>
+              <a:rPr lang="ko-KR" altLang="en-US" sz="2000" dirty="0">
+                <a:sym typeface="Wingdings" panose="05000000000000000000" pitchFamily="2" charset="2"/>
+              </a:rPr>
+              <a:t>후보 지점 중 </a:t>
+            </a:r>
+            <a:r>
+              <a:rPr lang="en-US" altLang="ko-KR" sz="2000" dirty="0" err="1">
+                <a:sym typeface="Wingdings" panose="05000000000000000000" pitchFamily="2" charset="2"/>
+              </a:rPr>
+              <a:t>npc</a:t>
+            </a:r>
+            <a:r>
+              <a:rPr lang="ko-KR" altLang="en-US" sz="2000" dirty="0">
+                <a:sym typeface="Wingdings" panose="05000000000000000000" pitchFamily="2" charset="2"/>
+              </a:rPr>
+              <a:t>가 기준에 따라 점수를 매겨 최적 지점을 고르는 방식</a:t>
+            </a:r>
+            <a:r>
+              <a:rPr lang="en-US" altLang="ko-KR" sz="2000" dirty="0">
+                <a:sym typeface="Wingdings" panose="05000000000000000000" pitchFamily="2" charset="2"/>
+              </a:rPr>
+              <a:t>, </a:t>
+            </a:r>
+            <a:r>
+              <a:rPr lang="ko-KR" altLang="en-US" sz="2000" dirty="0">
+                <a:sym typeface="Wingdings" panose="05000000000000000000" pitchFamily="2" charset="2"/>
+              </a:rPr>
+              <a:t>현재에만 반응</a:t>
+            </a:r>
+            <a:r>
+              <a:rPr lang="en-US" altLang="ko-KR" sz="2000" dirty="0">
+                <a:sym typeface="Wingdings" panose="05000000000000000000" pitchFamily="2" charset="2"/>
+              </a:rPr>
+              <a:t>)</a:t>
+            </a:r>
+            <a:endParaRPr lang="en-US" altLang="ko-KR" sz="2000" dirty="0"/>
           </a:p>
           <a:p>
             <a:pPr>
               <a:lnSpc>
-                <a:spcPct val="110000"/>
+                <a:spcPct val="100000"/>
               </a:lnSpc>
             </a:pPr>
-            <a:endParaRPr lang="en-US" altLang="ko-KR" sz="2400" dirty="0"/>
+            <a:endParaRPr lang="en-US" altLang="ko-KR" sz="2000" dirty="0"/>
           </a:p>
           <a:p>
             <a:pPr>
               <a:lnSpc>
-                <a:spcPct val="110000"/>
+                <a:spcPct val="100000"/>
               </a:lnSpc>
             </a:pPr>
             <a:r>
-              <a:rPr lang="ko-KR" altLang="en-US" sz="2400" dirty="0"/>
+              <a:rPr lang="ko-KR" altLang="en-US" sz="2000" dirty="0"/>
               <a:t>정량 지표</a:t>
             </a:r>
             <a:br>
-              <a:rPr lang="en-US" altLang="ko-KR" sz="2400" dirty="0"/>
+              <a:rPr lang="en-US" altLang="ko-KR" sz="2000" dirty="0"/>
             </a:br>
             <a:r>
-              <a:rPr lang="en-US" altLang="ko-KR" sz="2400" dirty="0">
+              <a:rPr lang="en-US" altLang="ko-KR" sz="2000" dirty="0">
                 <a:sym typeface="Wingdings" panose="05000000000000000000" pitchFamily="2" charset="2"/>
               </a:rPr>
               <a:t> </a:t>
             </a:r>
             <a:r>
-              <a:rPr lang="ko-KR" altLang="en-US" sz="2400" dirty="0">
+              <a:rPr lang="ko-KR" altLang="en-US" sz="2000" dirty="0">
                 <a:sym typeface="Wingdings" panose="05000000000000000000" pitchFamily="2" charset="2"/>
               </a:rPr>
               <a:t>플레이어 경험</a:t>
             </a:r>
             <a:r>
-              <a:rPr lang="en-US" altLang="ko-KR" sz="2400" dirty="0">
+              <a:rPr lang="en-US" altLang="ko-KR" sz="2000" dirty="0">
                 <a:sym typeface="Wingdings" panose="05000000000000000000" pitchFamily="2" charset="2"/>
               </a:rPr>
               <a:t>/</a:t>
             </a:r>
             <a:r>
-              <a:rPr lang="ko-KR" altLang="en-US" sz="2400" dirty="0">
+              <a:rPr lang="ko-KR" altLang="en-US" sz="2000" dirty="0">
                 <a:sym typeface="Wingdings" panose="05000000000000000000" pitchFamily="2" charset="2"/>
               </a:rPr>
               <a:t>주관적 신뢰도</a:t>
             </a:r>
             <a:br>
-              <a:rPr lang="en-US" altLang="ko-KR" sz="2400" dirty="0">
+              <a:rPr lang="en-US" altLang="ko-KR" sz="2000" dirty="0">
                 <a:sym typeface="Wingdings" panose="05000000000000000000" pitchFamily="2" charset="2"/>
               </a:rPr>
             </a:br>
             <a:r>
-              <a:rPr lang="en-US" altLang="ko-KR" sz="2400" dirty="0">
+              <a:rPr lang="en-US" altLang="ko-KR" sz="2000" dirty="0">
                 <a:sym typeface="Wingdings" panose="05000000000000000000" pitchFamily="2" charset="2"/>
               </a:rPr>
               <a:t></a:t>
             </a:r>
             <a:r>
-              <a:rPr lang="ko-KR" altLang="en-US" sz="2400" dirty="0">
+              <a:rPr lang="ko-KR" altLang="en-US" sz="2000" dirty="0">
                 <a:sym typeface="Wingdings" panose="05000000000000000000" pitchFamily="2" charset="2"/>
               </a:rPr>
               <a:t> 연산 비용</a:t>
             </a:r>
             <a:br>
-              <a:rPr lang="en-US" altLang="ko-KR" sz="2400" dirty="0">
+              <a:rPr lang="en-US" altLang="ko-KR" sz="2000" dirty="0">
                 <a:sym typeface="Wingdings" panose="05000000000000000000" pitchFamily="2" charset="2"/>
               </a:rPr>
             </a:br>
             <a:r>
-              <a:rPr lang="en-US" altLang="ko-KR" sz="2400" dirty="0">
+              <a:rPr lang="en-US" altLang="ko-KR" sz="2000" dirty="0">
                 <a:sym typeface="Wingdings" panose="05000000000000000000" pitchFamily="2" charset="2"/>
               </a:rPr>
               <a:t> AI</a:t>
             </a:r>
             <a:r>
-              <a:rPr lang="ko-KR" altLang="en-US" sz="2400" dirty="0">
+              <a:rPr lang="ko-KR" altLang="en-US" sz="2000" dirty="0">
                 <a:sym typeface="Wingdings" panose="05000000000000000000" pitchFamily="2" charset="2"/>
               </a:rPr>
               <a:t>의 </a:t>
             </a:r>
             <a:r>
-              <a:rPr lang="ko-KR" altLang="en-US" sz="2400" dirty="0" err="1">
+              <a:rPr lang="ko-KR" altLang="en-US" sz="2000" dirty="0" err="1">
                 <a:sym typeface="Wingdings" panose="05000000000000000000" pitchFamily="2" charset="2"/>
               </a:rPr>
               <a:t>재계획</a:t>
             </a:r>
             <a:r>
-              <a:rPr lang="ko-KR" altLang="en-US" sz="2400" dirty="0">
+              <a:rPr lang="ko-KR" altLang="en-US" sz="2000" dirty="0">
                 <a:sym typeface="Wingdings" panose="05000000000000000000" pitchFamily="2" charset="2"/>
               </a:rPr>
               <a:t> 빈도</a:t>
             </a:r>
             <a:r>
-              <a:rPr lang="en-US" altLang="ko-KR" sz="2400" dirty="0">
+              <a:rPr lang="en-US" altLang="ko-KR" sz="2000" dirty="0">
                 <a:sym typeface="Wingdings" panose="05000000000000000000" pitchFamily="2" charset="2"/>
               </a:rPr>
               <a:t>(</a:t>
             </a:r>
             <a:r>
-              <a:rPr lang="ko-KR" altLang="en-US" sz="2400" dirty="0">
+              <a:rPr lang="ko-KR" altLang="en-US" sz="2000" dirty="0">
                 <a:sym typeface="Wingdings" panose="05000000000000000000" pitchFamily="2" charset="2"/>
               </a:rPr>
               <a:t>낮을수록 </a:t>
             </a:r>
             <a:br>
-              <a:rPr lang="en-US" altLang="ko-KR" sz="2400" dirty="0">
+              <a:rPr lang="en-US" altLang="ko-KR" sz="2000" dirty="0">
                 <a:sym typeface="Wingdings" panose="05000000000000000000" pitchFamily="2" charset="2"/>
               </a:rPr>
             </a:br>
             <a:r>
-              <a:rPr lang="ko-KR" altLang="en-US" sz="2400" dirty="0">
+              <a:rPr lang="ko-KR" altLang="en-US" sz="2000" dirty="0">
                 <a:sym typeface="Wingdings" panose="05000000000000000000" pitchFamily="2" charset="2"/>
               </a:rPr>
               <a:t>안정적</a:t>
             </a:r>
             <a:r>
-              <a:rPr lang="en-US" altLang="ko-KR" sz="2400" dirty="0">
+              <a:rPr lang="en-US" altLang="ko-KR" sz="2000" dirty="0">
                 <a:sym typeface="Wingdings" panose="05000000000000000000" pitchFamily="2" charset="2"/>
               </a:rPr>
               <a:t>)</a:t>
             </a:r>
             <a:br>
-              <a:rPr lang="en-US" altLang="ko-KR" sz="2400" dirty="0">
+              <a:rPr lang="en-US" altLang="ko-KR" sz="2000" dirty="0">
                 <a:sym typeface="Wingdings" panose="05000000000000000000" pitchFamily="2" charset="2"/>
               </a:rPr>
             </a:br>
             <a:r>
-              <a:rPr lang="en-US" altLang="ko-KR" sz="2400" dirty="0">
+              <a:rPr lang="en-US" altLang="ko-KR" sz="2000" dirty="0">
                 <a:sym typeface="Wingdings" panose="05000000000000000000" pitchFamily="2" charset="2"/>
               </a:rPr>
               <a:t> </a:t>
             </a:r>
             <a:r>
-              <a:rPr lang="ko-KR" altLang="en-US" sz="2400" dirty="0">
+              <a:rPr lang="ko-KR" altLang="en-US" sz="2000" dirty="0">
                 <a:sym typeface="Wingdings" panose="05000000000000000000" pitchFamily="2" charset="2"/>
               </a:rPr>
               <a:t>예측과 실제 </a:t>
             </a:r>
             <a:r>
-              <a:rPr lang="ko-KR" altLang="en-US" sz="2400" dirty="0" err="1">
+              <a:rPr lang="ko-KR" altLang="en-US" sz="2000" dirty="0" err="1">
                 <a:sym typeface="Wingdings" panose="05000000000000000000" pitchFamily="2" charset="2"/>
               </a:rPr>
               <a:t>교전량</a:t>
             </a:r>
-            <a:endParaRPr lang="en-US" altLang="ko-KR" sz="2400" dirty="0">
+            <a:endParaRPr lang="en-US" altLang="ko-KR" sz="2000" dirty="0">
               <a:sym typeface="Wingdings" panose="05000000000000000000" pitchFamily="2" charset="2"/>
             </a:endParaRPr>
           </a:p>
@@ -6139,7 +6229,31 @@
               <a:rPr lang="ko-KR" altLang="en-US" dirty="0">
                 <a:sym typeface="Wingdings" panose="05000000000000000000" pitchFamily="2" charset="2"/>
               </a:rPr>
-              <a:t>화물 특성</a:t>
+              <a:t>화물</a:t>
+            </a:r>
+            <a:r>
+              <a:rPr lang="en-US" altLang="ko-KR" dirty="0">
+                <a:sym typeface="Wingdings" panose="05000000000000000000" pitchFamily="2" charset="2"/>
+              </a:rPr>
+              <a:t>(</a:t>
+            </a:r>
+            <a:r>
+              <a:rPr lang="ko-KR" altLang="en-US" dirty="0">
+                <a:sym typeface="Wingdings" panose="05000000000000000000" pitchFamily="2" charset="2"/>
+              </a:rPr>
+              <a:t>플레이어가 소지 중인 아이템</a:t>
+            </a:r>
+            <a:r>
+              <a:rPr lang="en-US" altLang="ko-KR" dirty="0">
+                <a:sym typeface="Wingdings" panose="05000000000000000000" pitchFamily="2" charset="2"/>
+              </a:rPr>
+              <a:t>)</a:t>
+            </a:r>
+            <a:r>
+              <a:rPr lang="ko-KR" altLang="en-US" dirty="0">
+                <a:sym typeface="Wingdings" panose="05000000000000000000" pitchFamily="2" charset="2"/>
+              </a:rPr>
+              <a:t> 특성</a:t>
             </a:r>
             <a:br>
               <a:rPr lang="en-US" altLang="ko-KR" dirty="0">
@@ -6174,6 +6288,35 @@
                 <a:sym typeface="Wingdings" panose="05000000000000000000" pitchFamily="2" charset="2"/>
               </a:rPr>
               <a:t>종간 관계</a:t>
+            </a:r>
+            <a:br>
+              <a:rPr lang="en-US" altLang="ko-KR" dirty="0">
+                <a:sym typeface="Wingdings" panose="05000000000000000000" pitchFamily="2" charset="2"/>
+              </a:rPr>
+            </a:br>
+            <a:r>
+              <a:rPr lang="en-US" altLang="ko-KR" dirty="0">
+                <a:sym typeface="Wingdings" panose="05000000000000000000" pitchFamily="2" charset="2"/>
+              </a:rPr>
+              <a:t> </a:t>
+            </a:r>
+            <a:r>
+              <a:rPr lang="ko-KR" altLang="en-US" dirty="0">
+                <a:sym typeface="Wingdings" panose="05000000000000000000" pitchFamily="2" charset="2"/>
+              </a:rPr>
+              <a:t>각 </a:t>
+            </a:r>
+            <a:r>
+              <a:rPr lang="en-US" altLang="ko-KR" dirty="0" err="1">
+                <a:sym typeface="Wingdings" panose="05000000000000000000" pitchFamily="2" charset="2"/>
+              </a:rPr>
+              <a:t>npc</a:t>
+            </a:r>
+            <a:r>
+              <a:rPr lang="ko-KR" altLang="en-US" dirty="0">
+                <a:sym typeface="Wingdings" panose="05000000000000000000" pitchFamily="2" charset="2"/>
+              </a:rPr>
+              <a:t>의 위치</a:t>
             </a:r>
             <a:br>
               <a:rPr lang="en-US" altLang="ko-KR" dirty="0">
@@ -6303,7 +6446,7 @@
               <a:rPr lang="ko-KR" altLang="en-US" dirty="0">
                 <a:sym typeface="Wingdings" panose="05000000000000000000" pitchFamily="2" charset="2"/>
               </a:rPr>
-              <a:t>거리 등의 요소</a:t>
+              <a:t>거리 등의 요소 이용</a:t>
             </a:r>
             <a:r>
               <a:rPr lang="en-US" altLang="ko-KR" dirty="0">
